--- a/Behavioral_Alignment.pptx
+++ b/Behavioral_Alignment.pptx
@@ -22,6 +22,8 @@
     <p:sldId id="271" r:id="rId16"/>
     <p:sldId id="273" r:id="rId17"/>
     <p:sldId id="274" r:id="rId18"/>
+    <p:sldId id="276" r:id="rId19"/>
+    <p:sldId id="275" r:id="rId20"/>
   </p:sldIdLst>
   <p:sldSz cx="12192000" cy="6858000"/>
   <p:notesSz cx="6858000" cy="9144000"/>
@@ -275,7 +277,7 @@
           <a:p>
             <a:fld id="{ACA8ECE1-4E3E-4924-B4DA-647ABC0036ED}" type="datetimeFigureOut">
               <a:rPr lang="en-US" smtClean="0"/>
-              <a:t>10/14/2026</a:t>
+              <a:t>10/21/2026</a:t>
             </a:fld>
             <a:endParaRPr lang="en-US"/>
           </a:p>
@@ -473,7 +475,7 @@
           <a:p>
             <a:fld id="{ACA8ECE1-4E3E-4924-B4DA-647ABC0036ED}" type="datetimeFigureOut">
               <a:rPr lang="en-US" smtClean="0"/>
-              <a:t>10/14/2026</a:t>
+              <a:t>10/21/2026</a:t>
             </a:fld>
             <a:endParaRPr lang="en-US"/>
           </a:p>
@@ -681,7 +683,7 @@
           <a:p>
             <a:fld id="{ACA8ECE1-4E3E-4924-B4DA-647ABC0036ED}" type="datetimeFigureOut">
               <a:rPr lang="en-US" smtClean="0"/>
-              <a:t>10/14/2026</a:t>
+              <a:t>10/21/2026</a:t>
             </a:fld>
             <a:endParaRPr lang="en-US"/>
           </a:p>
@@ -879,7 +881,7 @@
           <a:p>
             <a:fld id="{ACA8ECE1-4E3E-4924-B4DA-647ABC0036ED}" type="datetimeFigureOut">
               <a:rPr lang="en-US" smtClean="0"/>
-              <a:t>10/14/2026</a:t>
+              <a:t>10/21/2026</a:t>
             </a:fld>
             <a:endParaRPr lang="en-US"/>
           </a:p>
@@ -1154,7 +1156,7 @@
           <a:p>
             <a:fld id="{ACA8ECE1-4E3E-4924-B4DA-647ABC0036ED}" type="datetimeFigureOut">
               <a:rPr lang="en-US" smtClean="0"/>
-              <a:t>10/14/2026</a:t>
+              <a:t>10/21/2026</a:t>
             </a:fld>
             <a:endParaRPr lang="en-US"/>
           </a:p>
@@ -1419,7 +1421,7 @@
           <a:p>
             <a:fld id="{ACA8ECE1-4E3E-4924-B4DA-647ABC0036ED}" type="datetimeFigureOut">
               <a:rPr lang="en-US" smtClean="0"/>
-              <a:t>10/14/2026</a:t>
+              <a:t>10/21/2026</a:t>
             </a:fld>
             <a:endParaRPr lang="en-US"/>
           </a:p>
@@ -1831,7 +1833,7 @@
           <a:p>
             <a:fld id="{ACA8ECE1-4E3E-4924-B4DA-647ABC0036ED}" type="datetimeFigureOut">
               <a:rPr lang="en-US" smtClean="0"/>
-              <a:t>10/14/2026</a:t>
+              <a:t>10/21/2026</a:t>
             </a:fld>
             <a:endParaRPr lang="en-US"/>
           </a:p>
@@ -1972,7 +1974,7 @@
           <a:p>
             <a:fld id="{ACA8ECE1-4E3E-4924-B4DA-647ABC0036ED}" type="datetimeFigureOut">
               <a:rPr lang="en-US" smtClean="0"/>
-              <a:t>10/14/2026</a:t>
+              <a:t>10/21/2026</a:t>
             </a:fld>
             <a:endParaRPr lang="en-US"/>
           </a:p>
@@ -2085,7 +2087,7 @@
           <a:p>
             <a:fld id="{ACA8ECE1-4E3E-4924-B4DA-647ABC0036ED}" type="datetimeFigureOut">
               <a:rPr lang="en-US" smtClean="0"/>
-              <a:t>10/14/2026</a:t>
+              <a:t>10/21/2026</a:t>
             </a:fld>
             <a:endParaRPr lang="en-US"/>
           </a:p>
@@ -2396,7 +2398,7 @@
           <a:p>
             <a:fld id="{ACA8ECE1-4E3E-4924-B4DA-647ABC0036ED}" type="datetimeFigureOut">
               <a:rPr lang="en-US" smtClean="0"/>
-              <a:t>10/14/2026</a:t>
+              <a:t>10/21/2026</a:t>
             </a:fld>
             <a:endParaRPr lang="en-US"/>
           </a:p>
@@ -2684,7 +2686,7 @@
           <a:p>
             <a:fld id="{ACA8ECE1-4E3E-4924-B4DA-647ABC0036ED}" type="datetimeFigureOut">
               <a:rPr lang="en-US" smtClean="0"/>
-              <a:t>10/14/2026</a:t>
+              <a:t>10/21/2026</a:t>
             </a:fld>
             <a:endParaRPr lang="en-US"/>
           </a:p>
@@ -2925,7 +2927,7 @@
           <a:p>
             <a:fld id="{ACA8ECE1-4E3E-4924-B4DA-647ABC0036ED}" type="datetimeFigureOut">
               <a:rPr lang="en-US" smtClean="0"/>
-              <a:t>10/14/2026</a:t>
+              <a:t>10/21/2026</a:t>
             </a:fld>
             <a:endParaRPr lang="en-US"/>
           </a:p>
@@ -9958,6 +9960,1065 @@
 </p:sld>
 </file>
 
+<file path=ppt/slides/slide18.xml><?xml version="1.0" encoding="utf-8"?>
+<p:sld xmlns:a="http://schemas.openxmlformats.org/drawingml/2006/main" xmlns:r="http://schemas.openxmlformats.org/officeDocument/2006/relationships" xmlns:p="http://schemas.openxmlformats.org/presentationml/2006/main">
+  <p:cSld>
+    <p:spTree>
+      <p:nvGrpSpPr>
+        <p:cNvPr id="1" name=""/>
+        <p:cNvGrpSpPr/>
+        <p:nvPr/>
+      </p:nvGrpSpPr>
+      <p:grpSpPr>
+        <a:xfrm>
+          <a:off x="0" y="0"/>
+          <a:ext cx="0" cy="0"/>
+          <a:chOff x="0" y="0"/>
+          <a:chExt cx="0" cy="0"/>
+        </a:xfrm>
+      </p:grpSpPr>
+      <p:sp>
+        <p:nvSpPr>
+          <p:cNvPr id="10" name="Title"/>
+          <p:cNvSpPr/>
+          <p:nvPr/>
+        </p:nvSpPr>
+        <p:spPr>
+          <a:xfrm>
+            <a:off x="431800" y="400000"/>
+            <a:ext cx="11328400" cy="600000"/>
+          </a:xfrm>
+          <a:prstGeom prst="rect">
+            <a:avLst/>
+          </a:prstGeom>
+          <a:solidFill>
+            <a:srgbClr val="FFFFFF"/>
+          </a:solidFill>
+          <a:ln>
+            <a:noFill/>
+          </a:ln>
+        </p:spPr>
+        <p:txBody>
+          <a:bodyPr wrap="square" lIns="137160" tIns="91440" rIns="137160" bIns="91440" anchor="t"/>
+          <a:lstStyle/>
+          <a:p>
+            <a:pPr marL="0" indent="0" algn="l">
+              <a:buNone/>
+            </a:pPr>
+            <a:r>
+              <a:rPr lang="en-US" sz="2800" b="1" dirty="0">
+                <a:solidFill>
+                  <a:srgbClr val="0E2841"/>
+                </a:solidFill>
+                <a:latin typeface="Aptos"/>
+              </a:rPr>
+              <a:t>Prompt Optimization Techniques – LLM as Judge (Evaluation)</a:t>
+            </a:r>
+            <a:endParaRPr sz="2800" b="1" dirty="0">
+              <a:solidFill>
+                <a:srgbClr val="0E2841"/>
+              </a:solidFill>
+              <a:latin typeface="Aptos"/>
+            </a:endParaRPr>
+          </a:p>
+        </p:txBody>
+      </p:sp>
+      <p:sp>
+        <p:nvSpPr>
+          <p:cNvPr id="11" name="Rule"/>
+          <p:cNvSpPr/>
+          <p:nvPr/>
+        </p:nvSpPr>
+        <p:spPr>
+          <a:xfrm>
+            <a:off x="431800" y="1080000"/>
+            <a:ext cx="11328400" cy="27432"/>
+          </a:xfrm>
+          <a:prstGeom prst="rect">
+            <a:avLst/>
+          </a:prstGeom>
+          <a:solidFill>
+            <a:srgbClr val="0E2841"/>
+          </a:solidFill>
+          <a:ln>
+            <a:noFill/>
+          </a:ln>
+        </p:spPr>
+        <p:txBody>
+          <a:bodyPr wrap="square" lIns="137160" tIns="91440" rIns="137160" bIns="91440" anchor="t">
+            <a:normAutofit fontScale="25000" lnSpcReduction="20000"/>
+          </a:bodyPr>
+          <a:lstStyle/>
+          <a:p>
+            <a:endParaRPr/>
+          </a:p>
+        </p:txBody>
+      </p:sp>
+      <p:sp>
+        <p:nvSpPr>
+          <p:cNvPr id="20" name="Head1"/>
+          <p:cNvSpPr/>
+          <p:nvPr/>
+        </p:nvSpPr>
+        <p:spPr>
+          <a:xfrm>
+            <a:off x="431800" y="1780000"/>
+            <a:ext cx="5544200" cy="400000"/>
+          </a:xfrm>
+          <a:prstGeom prst="rect">
+            <a:avLst/>
+          </a:prstGeom>
+          <a:solidFill>
+            <a:srgbClr val="0E2841"/>
+          </a:solidFill>
+          <a:ln>
+            <a:noFill/>
+          </a:ln>
+        </p:spPr>
+        <p:txBody>
+          <a:bodyPr wrap="square" lIns="137160" tIns="45720" rIns="137160" bIns="45720" anchor="ctr"/>
+          <a:lstStyle/>
+          <a:p>
+            <a:pPr marL="0" indent="0" algn="l">
+              <a:buNone/>
+            </a:pPr>
+            <a:r>
+              <a:rPr sz="1400" b="1">
+                <a:solidFill>
+                  <a:srgbClr val="FFFFFF"/>
+                </a:solidFill>
+                <a:latin typeface="Aptos"/>
+              </a:rPr>
+              <a:t>1  Common optimization loop</a:t>
+            </a:r>
+          </a:p>
+        </p:txBody>
+      </p:sp>
+      <p:sp>
+        <p:nvSpPr>
+          <p:cNvPr id="21" name="Body1"/>
+          <p:cNvSpPr/>
+          <p:nvPr/>
+        </p:nvSpPr>
+        <p:spPr>
+          <a:xfrm>
+            <a:off x="431800" y="2180000"/>
+            <a:ext cx="5544200" cy="620000"/>
+          </a:xfrm>
+          <a:prstGeom prst="rect">
+            <a:avLst/>
+          </a:prstGeom>
+          <a:solidFill>
+            <a:srgbClr val="F2F5F9"/>
+          </a:solidFill>
+          <a:ln>
+            <a:noFill/>
+          </a:ln>
+        </p:spPr>
+        <p:txBody>
+          <a:bodyPr wrap="square" lIns="137160" tIns="91440" rIns="137160" bIns="91440" anchor="ctr"/>
+          <a:lstStyle/>
+          <a:p>
+            <a:pPr marL="0" indent="0" algn="l">
+              <a:buNone/>
+            </a:pPr>
+            <a:r>
+              <a:rPr sz="1200" b="0">
+                <a:solidFill>
+                  <a:srgbClr val="44546A"/>
+                </a:solidFill>
+                <a:latin typeface="Aptos"/>
+              </a:rPr>
+              <a:t>Evaluate the shared baseline, inspect up to 12 parent errors, revise from the best candidate, score the full training set, checkpoint, and stop after six generated candidates.</a:t>
+            </a:r>
+          </a:p>
+        </p:txBody>
+      </p:sp>
+      <p:sp>
+        <p:nvSpPr>
+          <p:cNvPr id="22" name="Head2"/>
+          <p:cNvSpPr/>
+          <p:nvPr/>
+        </p:nvSpPr>
+        <p:spPr>
+          <a:xfrm>
+            <a:off x="6216000" y="1780000"/>
+            <a:ext cx="5544200" cy="400000"/>
+          </a:xfrm>
+          <a:prstGeom prst="rect">
+            <a:avLst/>
+          </a:prstGeom>
+          <a:solidFill>
+            <a:srgbClr val="2E75B6"/>
+          </a:solidFill>
+          <a:ln>
+            <a:noFill/>
+          </a:ln>
+        </p:spPr>
+        <p:txBody>
+          <a:bodyPr wrap="square" lIns="137160" tIns="45720" rIns="137160" bIns="45720" anchor="ctr"/>
+          <a:lstStyle/>
+          <a:p>
+            <a:pPr marL="0" indent="0" algn="l">
+              <a:buNone/>
+            </a:pPr>
+            <a:r>
+              <a:rPr sz="1400" b="1">
+                <a:solidFill>
+                  <a:srgbClr val="FFFFFF"/>
+                </a:solidFill>
+                <a:latin typeface="Aptos"/>
+              </a:rPr>
+              <a:t>2  OPRO-style direct rewriting</a:t>
+            </a:r>
+          </a:p>
+        </p:txBody>
+      </p:sp>
+      <p:sp>
+        <p:nvSpPr>
+          <p:cNvPr id="23" name="Body2"/>
+          <p:cNvSpPr/>
+          <p:nvPr/>
+        </p:nvSpPr>
+        <p:spPr>
+          <a:xfrm>
+            <a:off x="6216000" y="2180000"/>
+            <a:ext cx="5544200" cy="620000"/>
+          </a:xfrm>
+          <a:prstGeom prst="rect">
+            <a:avLst/>
+          </a:prstGeom>
+          <a:solidFill>
+            <a:srgbClr val="F2F5F9"/>
+          </a:solidFill>
+          <a:ln>
+            <a:noFill/>
+          </a:ln>
+        </p:spPr>
+        <p:txBody>
+          <a:bodyPr wrap="square" lIns="137160" tIns="91440" rIns="137160" bIns="91440" anchor="ctr"/>
+          <a:lstStyle/>
+          <a:p>
+            <a:pPr marL="0" indent="0" algn="l">
+              <a:buNone/>
+            </a:pPr>
+            <a:r>
+              <a:rPr sz="1200" b="0">
+                <a:solidFill>
+                  <a:srgbClr val="44546A"/>
+                </a:solidFill>
+                <a:latin typeface="Aptos"/>
+              </a:rPr>
+              <a:t>One call diagnoses errors and returns a complete replacement instruction. Greedy best-parent search creates six serial children.</a:t>
+            </a:r>
+          </a:p>
+        </p:txBody>
+      </p:sp>
+      <p:sp>
+        <p:nvSpPr>
+          <p:cNvPr id="24" name="Head3"/>
+          <p:cNvSpPr/>
+          <p:nvPr/>
+        </p:nvSpPr>
+        <p:spPr>
+          <a:xfrm>
+            <a:off x="431800" y="2980000"/>
+            <a:ext cx="5544200" cy="400000"/>
+          </a:xfrm>
+          <a:prstGeom prst="rect">
+            <a:avLst/>
+          </a:prstGeom>
+          <a:solidFill>
+            <a:srgbClr val="1F6F6F"/>
+          </a:solidFill>
+          <a:ln>
+            <a:noFill/>
+          </a:ln>
+        </p:spPr>
+        <p:txBody>
+          <a:bodyPr wrap="square" lIns="137160" tIns="45720" rIns="137160" bIns="45720" anchor="ctr"/>
+          <a:lstStyle/>
+          <a:p>
+            <a:pPr marL="0" indent="0" algn="l">
+              <a:buNone/>
+            </a:pPr>
+            <a:r>
+              <a:rPr sz="1400" b="1">
+                <a:solidFill>
+                  <a:srgbClr val="FFFFFF"/>
+                </a:solidFill>
+                <a:latin typeface="Aptos"/>
+              </a:rPr>
+              <a:t>3  Critique–refine</a:t>
+            </a:r>
+          </a:p>
+        </p:txBody>
+      </p:sp>
+      <p:sp>
+        <p:nvSpPr>
+          <p:cNvPr id="25" name="Body3"/>
+          <p:cNvSpPr/>
+          <p:nvPr/>
+        </p:nvSpPr>
+        <p:spPr>
+          <a:xfrm>
+            <a:off x="431800" y="3380000"/>
+            <a:ext cx="5544200" cy="620000"/>
+          </a:xfrm>
+          <a:prstGeom prst="rect">
+            <a:avLst/>
+          </a:prstGeom>
+          <a:solidFill>
+            <a:srgbClr val="F2F5F9"/>
+          </a:solidFill>
+          <a:ln>
+            <a:noFill/>
+          </a:ln>
+        </p:spPr>
+        <p:txBody>
+          <a:bodyPr wrap="square" lIns="137160" tIns="91440" rIns="137160" bIns="91440" anchor="ctr"/>
+          <a:lstStyle/>
+          <a:p>
+            <a:pPr marL="0" indent="0" algn="l">
+              <a:buNone/>
+            </a:pPr>
+            <a:r>
+              <a:rPr sz="1200" b="0">
+                <a:solidFill>
+                  <a:srgbClr val="44546A"/>
+                </a:solidFill>
+                <a:latin typeface="Aptos"/>
+              </a:rPr>
+              <a:t>Two calls per iteration: first diagnose systematic boundary failures, then independently translate the fixes into a reusable, example-free instruction.</a:t>
+            </a:r>
+          </a:p>
+        </p:txBody>
+      </p:sp>
+      <p:sp>
+        <p:nvSpPr>
+          <p:cNvPr id="26" name="Head4"/>
+          <p:cNvSpPr/>
+          <p:nvPr/>
+        </p:nvSpPr>
+        <p:spPr>
+          <a:xfrm>
+            <a:off x="6216000" y="2980000"/>
+            <a:ext cx="5544200" cy="400000"/>
+          </a:xfrm>
+          <a:prstGeom prst="rect">
+            <a:avLst/>
+          </a:prstGeom>
+          <a:solidFill>
+            <a:srgbClr val="7F8FA6"/>
+          </a:solidFill>
+          <a:ln>
+            <a:noFill/>
+          </a:ln>
+        </p:spPr>
+        <p:txBody>
+          <a:bodyPr wrap="square" lIns="137160" tIns="45720" rIns="137160" bIns="45720" anchor="ctr"/>
+          <a:lstStyle/>
+          <a:p>
+            <a:pPr marL="0" indent="0" algn="l">
+              <a:buNone/>
+            </a:pPr>
+            <a:r>
+              <a:rPr sz="1400" b="1">
+                <a:solidFill>
+                  <a:srgbClr val="FFFFFF"/>
+                </a:solidFill>
+                <a:latin typeface="Aptos"/>
+              </a:rPr>
+              <a:t>4  Evolutionary mutation search</a:t>
+            </a:r>
+          </a:p>
+        </p:txBody>
+      </p:sp>
+      <p:sp>
+        <p:nvSpPr>
+          <p:cNvPr id="27" name="Body4"/>
+          <p:cNvSpPr/>
+          <p:nvPr/>
+        </p:nvSpPr>
+        <p:spPr>
+          <a:xfrm>
+            <a:off x="6216000" y="3380000"/>
+            <a:ext cx="5544200" cy="620000"/>
+          </a:xfrm>
+          <a:prstGeom prst="rect">
+            <a:avLst/>
+          </a:prstGeom>
+          <a:solidFill>
+            <a:srgbClr val="F2F5F9"/>
+          </a:solidFill>
+          <a:ln>
+            <a:noFill/>
+          </a:ln>
+        </p:spPr>
+        <p:txBody>
+          <a:bodyPr wrap="square" lIns="137160" tIns="91440" rIns="137160" bIns="91440" anchor="ctr"/>
+          <a:lstStyle/>
+          <a:p>
+            <a:pPr marL="0" indent="0" algn="l">
+              <a:buNone/>
+            </a:pPr>
+            <a:r>
+              <a:rPr sz="1200" b="0">
+                <a:solidFill>
+                  <a:srgbClr val="44546A"/>
+                </a:solidFill>
+                <a:latin typeface="Aptos"/>
+              </a:rPr>
+              <a:t>One call returns three diverse mutations. Two batches use the six-candidate budget; the best candidate in the accumulated pool parents the next batch.</a:t>
+            </a:r>
+          </a:p>
+        </p:txBody>
+      </p:sp>
+      <p:sp>
+        <p:nvSpPr>
+          <p:cNvPr id="30" name="Takeaway"/>
+          <p:cNvSpPr/>
+          <p:nvPr/>
+        </p:nvSpPr>
+        <p:spPr>
+          <a:xfrm>
+            <a:off x="431800" y="4700000"/>
+            <a:ext cx="11328400" cy="1400000"/>
+          </a:xfrm>
+          <a:prstGeom prst="rect">
+            <a:avLst/>
+          </a:prstGeom>
+          <a:solidFill>
+            <a:srgbClr val="F4F7FB"/>
+          </a:solidFill>
+          <a:ln w="12700">
+            <a:solidFill>
+              <a:srgbClr val="0E2841"/>
+            </a:solidFill>
+          </a:ln>
+        </p:spPr>
+        <p:txBody>
+          <a:bodyPr wrap="square" lIns="182880" tIns="118872" rIns="182880" bIns="118872" anchor="t"/>
+          <a:lstStyle/>
+          <a:p>
+            <a:pPr marL="0" indent="0" algn="l">
+              <a:buNone/>
+            </a:pPr>
+            <a:r>
+              <a:rPr sz="1300">
+                <a:solidFill>
+                  <a:srgbClr val="333333"/>
+                </a:solidFill>
+                <a:latin typeface="Aptos"/>
+              </a:rPr>
+              <a:t>Robust ranking: mean training balanced accuracy → stability → lower variance → mean ordinary accuracy. Validation is used only after selection and never tunes the prompts.</a:t>
+            </a:r>
+          </a:p>
+        </p:txBody>
+      </p:sp>
+    </p:spTree>
+  </p:cSld>
+  <p:clrMapOvr>
+    <a:masterClrMapping/>
+  </p:clrMapOvr>
+</p:sld>
+</file>
+
+<file path=ppt/slides/slide19.xml><?xml version="1.0" encoding="utf-8"?>
+<p:sld xmlns:a="http://schemas.openxmlformats.org/drawingml/2006/main" xmlns:r="http://schemas.openxmlformats.org/officeDocument/2006/relationships" xmlns:p="http://schemas.openxmlformats.org/presentationml/2006/main">
+  <p:cSld>
+    <p:spTree>
+      <p:nvGrpSpPr>
+        <p:cNvPr id="1" name=""/>
+        <p:cNvGrpSpPr/>
+        <p:nvPr/>
+      </p:nvGrpSpPr>
+      <p:grpSpPr>
+        <a:xfrm>
+          <a:off x="0" y="0"/>
+          <a:ext cx="0" cy="0"/>
+          <a:chOff x="0" y="0"/>
+          <a:chExt cx="0" cy="0"/>
+        </a:xfrm>
+      </p:grpSpPr>
+      <p:sp>
+        <p:nvSpPr>
+          <p:cNvPr id="10" name="Title"/>
+          <p:cNvSpPr/>
+          <p:nvPr/>
+        </p:nvSpPr>
+        <p:spPr>
+          <a:xfrm>
+            <a:off x="431800" y="400000"/>
+            <a:ext cx="11328400" cy="600000"/>
+          </a:xfrm>
+          <a:prstGeom prst="rect">
+            <a:avLst/>
+          </a:prstGeom>
+          <a:solidFill>
+            <a:srgbClr val="FFFFFF"/>
+          </a:solidFill>
+          <a:ln>
+            <a:noFill/>
+          </a:ln>
+        </p:spPr>
+        <p:txBody>
+          <a:bodyPr wrap="square" lIns="137160" tIns="91440" rIns="137160" bIns="91440" anchor="t"/>
+          <a:lstStyle/>
+          <a:p>
+            <a:pPr marL="0" indent="0" algn="l">
+              <a:buNone/>
+            </a:pPr>
+            <a:r>
+              <a:rPr lang="en-US" sz="2800" b="1" dirty="0">
+                <a:solidFill>
+                  <a:srgbClr val="0E2841"/>
+                </a:solidFill>
+                <a:latin typeface="Aptos"/>
+              </a:rPr>
+              <a:t>Results </a:t>
+            </a:r>
+            <a:endParaRPr sz="2800" b="1" dirty="0">
+              <a:solidFill>
+                <a:srgbClr val="0E2841"/>
+              </a:solidFill>
+              <a:latin typeface="Aptos"/>
+            </a:endParaRPr>
+          </a:p>
+        </p:txBody>
+      </p:sp>
+      <p:sp>
+        <p:nvSpPr>
+          <p:cNvPr id="11" name="Rule"/>
+          <p:cNvSpPr/>
+          <p:nvPr/>
+        </p:nvSpPr>
+        <p:spPr>
+          <a:xfrm>
+            <a:off x="431800" y="1080000"/>
+            <a:ext cx="11328400" cy="27432"/>
+          </a:xfrm>
+          <a:prstGeom prst="rect">
+            <a:avLst/>
+          </a:prstGeom>
+          <a:solidFill>
+            <a:srgbClr val="0E2841"/>
+          </a:solidFill>
+          <a:ln>
+            <a:noFill/>
+          </a:ln>
+        </p:spPr>
+        <p:txBody>
+          <a:bodyPr wrap="square" lIns="137160" tIns="91440" rIns="137160" bIns="91440" anchor="t">
+            <a:normAutofit fontScale="25000" lnSpcReduction="20000"/>
+          </a:bodyPr>
+          <a:lstStyle/>
+          <a:p>
+            <a:endParaRPr/>
+          </a:p>
+        </p:txBody>
+      </p:sp>
+      <p:sp>
+        <p:nvSpPr>
+          <p:cNvPr id="12" name="Subtitle"/>
+          <p:cNvSpPr/>
+          <p:nvPr/>
+        </p:nvSpPr>
+        <p:spPr>
+          <a:xfrm>
+            <a:off x="431800" y="1180000"/>
+            <a:ext cx="11328400" cy="600000"/>
+          </a:xfrm>
+          <a:prstGeom prst="rect">
+            <a:avLst/>
+          </a:prstGeom>
+          <a:solidFill>
+            <a:srgbClr val="FFFFFF"/>
+          </a:solidFill>
+          <a:ln>
+            <a:noFill/>
+          </a:ln>
+        </p:spPr>
+        <p:txBody>
+          <a:bodyPr wrap="square" lIns="137160" tIns="91440" rIns="137160" bIns="91440" anchor="t"/>
+          <a:lstStyle/>
+          <a:p>
+            <a:pPr marL="0" indent="0" algn="l">
+              <a:buNone/>
+            </a:pPr>
+            <a:r>
+              <a:rPr sz="1200" b="1">
+                <a:solidFill>
+                  <a:srgbClr val="0E2841"/>
+                </a:solidFill>
+                <a:latin typeface="Aptos"/>
+              </a:rPr>
+              <a:t>Model: azure/gpt-5.6-sol  •  six generated candidates per method  •  three evaluations per prompt  •  50 train / 50 held-out validation examples</a:t>
+            </a:r>
+          </a:p>
+        </p:txBody>
+      </p:sp>
+      <p:sp>
+        <p:nvSpPr>
+          <p:cNvPr id="20" name="Head0"/>
+          <p:cNvSpPr/>
+          <p:nvPr/>
+        </p:nvSpPr>
+        <p:spPr>
+          <a:xfrm>
+            <a:off x="431800" y="2050000"/>
+            <a:ext cx="3666800" cy="440000"/>
+          </a:xfrm>
+          <a:prstGeom prst="rect">
+            <a:avLst/>
+          </a:prstGeom>
+          <a:solidFill>
+            <a:srgbClr val="0E2841"/>
+          </a:solidFill>
+          <a:ln>
+            <a:noFill/>
+          </a:ln>
+        </p:spPr>
+        <p:txBody>
+          <a:bodyPr wrap="square" lIns="137160" tIns="91440" rIns="137160" bIns="91440" anchor="ctr"/>
+          <a:lstStyle/>
+          <a:p>
+            <a:pPr marL="0" indent="0" algn="l">
+              <a:buNone/>
+            </a:pPr>
+            <a:r>
+              <a:rPr sz="1400" b="1">
+                <a:solidFill>
+                  <a:srgbClr val="FFFFFF"/>
+                </a:solidFill>
+                <a:latin typeface="Aptos"/>
+              </a:rPr>
+              <a:t>OPRO</a:t>
+            </a:r>
+          </a:p>
+        </p:txBody>
+      </p:sp>
+      <p:sp>
+        <p:nvSpPr>
+          <p:cNvPr id="21" name="Body0"/>
+          <p:cNvSpPr/>
+          <p:nvPr/>
+        </p:nvSpPr>
+        <p:spPr>
+          <a:xfrm>
+            <a:off x="431800" y="2490000"/>
+            <a:ext cx="3666800" cy="2050000"/>
+          </a:xfrm>
+          <a:prstGeom prst="rect">
+            <a:avLst/>
+          </a:prstGeom>
+          <a:solidFill>
+            <a:srgbClr val="F2F5F9"/>
+          </a:solidFill>
+          <a:ln>
+            <a:noFill/>
+          </a:ln>
+        </p:spPr>
+        <p:txBody>
+          <a:bodyPr wrap="square" lIns="137160" tIns="91440" rIns="137160" bIns="91440" anchor="t"/>
+          <a:lstStyle/>
+          <a:p>
+            <a:pPr marL="0" indent="0" algn="l">
+              <a:buNone/>
+            </a:pPr>
+            <a:r>
+              <a:rPr sz="1200" b="0">
+                <a:solidFill>
+                  <a:srgbClr val="44546A"/>
+                </a:solidFill>
+                <a:latin typeface="Aptos"/>
+              </a:rPr>
+              <a:t>Train balanced accuracy   0.932</a:t>
+            </a:r>
+          </a:p>
+          <a:p>
+            <a:pPr algn="l"/>
+            <a:r>
+              <a:rPr sz="1200" b="0">
+                <a:solidFill>
+                  <a:srgbClr val="44546A"/>
+                </a:solidFill>
+                <a:latin typeface="Aptos"/>
+              </a:rPr>
+              <a:t>Validation balanced accuracy   0.931</a:t>
+            </a:r>
+          </a:p>
+          <a:p>
+            <a:pPr algn="l"/>
+            <a:r>
+              <a:rPr sz="1200" b="0">
+                <a:solidFill>
+                  <a:srgbClr val="44546A"/>
+                </a:solidFill>
+                <a:latin typeface="Aptos"/>
+              </a:rPr>
+              <a:t>Stability   0.987</a:t>
+            </a:r>
+          </a:p>
+          <a:p>
+            <a:pPr algn="l"/>
+            <a:r>
+              <a:rPr sz="1200" b="0">
+                <a:solidFill>
+                  <a:srgbClr val="44546A"/>
+                </a:solidFill>
+                <a:latin typeface="Aptos"/>
+              </a:rPr>
+              <a:t>Variance   0.000459</a:t>
+            </a:r>
+          </a:p>
+          <a:p>
+            <a:pPr algn="l"/>
+            <a:endParaRPr sz="1200" b="0">
+              <a:solidFill>
+                <a:srgbClr val="44546A"/>
+              </a:solidFill>
+              <a:latin typeface="Aptos"/>
+            </a:endParaRPr>
+          </a:p>
+          <a:p>
+            <a:pPr algn="l"/>
+            <a:r>
+              <a:rPr sz="1200" b="0">
+                <a:solidFill>
+                  <a:srgbClr val="44546A"/>
+                </a:solidFill>
+                <a:latin typeface="Aptos"/>
+              </a:rPr>
+              <a:t>Best held-out score; train–validation gap: 0.1 point.</a:t>
+            </a:r>
+          </a:p>
+        </p:txBody>
+      </p:sp>
+      <p:sp>
+        <p:nvSpPr>
+          <p:cNvPr id="22" name="Head1"/>
+          <p:cNvSpPr/>
+          <p:nvPr/>
+        </p:nvSpPr>
+        <p:spPr>
+          <a:xfrm>
+            <a:off x="4262600" y="2050000"/>
+            <a:ext cx="3666800" cy="440000"/>
+          </a:xfrm>
+          <a:prstGeom prst="rect">
+            <a:avLst/>
+          </a:prstGeom>
+          <a:solidFill>
+            <a:srgbClr val="2E75B6"/>
+          </a:solidFill>
+          <a:ln>
+            <a:noFill/>
+          </a:ln>
+        </p:spPr>
+        <p:txBody>
+          <a:bodyPr wrap="square" lIns="137160" tIns="91440" rIns="137160" bIns="91440" anchor="ctr"/>
+          <a:lstStyle/>
+          <a:p>
+            <a:pPr marL="0" indent="0" algn="l">
+              <a:buNone/>
+            </a:pPr>
+            <a:r>
+              <a:rPr sz="1400" b="1">
+                <a:solidFill>
+                  <a:srgbClr val="FFFFFF"/>
+                </a:solidFill>
+                <a:latin typeface="Aptos"/>
+              </a:rPr>
+              <a:t>CRITIQUE–REFINE</a:t>
+            </a:r>
+          </a:p>
+        </p:txBody>
+      </p:sp>
+      <p:sp>
+        <p:nvSpPr>
+          <p:cNvPr id="23" name="Body1"/>
+          <p:cNvSpPr/>
+          <p:nvPr/>
+        </p:nvSpPr>
+        <p:spPr>
+          <a:xfrm>
+            <a:off x="4262600" y="2490000"/>
+            <a:ext cx="3666800" cy="2050000"/>
+          </a:xfrm>
+          <a:prstGeom prst="rect">
+            <a:avLst/>
+          </a:prstGeom>
+          <a:solidFill>
+            <a:srgbClr val="F2F5F9"/>
+          </a:solidFill>
+          <a:ln>
+            <a:noFill/>
+          </a:ln>
+        </p:spPr>
+        <p:txBody>
+          <a:bodyPr wrap="square" lIns="137160" tIns="91440" rIns="137160" bIns="91440" anchor="t"/>
+          <a:lstStyle/>
+          <a:p>
+            <a:pPr marL="0" indent="0" algn="l">
+              <a:buNone/>
+            </a:pPr>
+            <a:r>
+              <a:rPr sz="1200" b="0">
+                <a:solidFill>
+                  <a:srgbClr val="44546A"/>
+                </a:solidFill>
+                <a:latin typeface="Aptos"/>
+              </a:rPr>
+              <a:t>Train balanced accuracy   0.910</a:t>
+            </a:r>
+          </a:p>
+          <a:p>
+            <a:pPr algn="l"/>
+            <a:r>
+              <a:rPr sz="1200" b="0">
+                <a:solidFill>
+                  <a:srgbClr val="44546A"/>
+                </a:solidFill>
+                <a:latin typeface="Aptos"/>
+              </a:rPr>
+              <a:t>Validation balanced accuracy   0.886</a:t>
+            </a:r>
+          </a:p>
+          <a:p>
+            <a:pPr algn="l"/>
+            <a:r>
+              <a:rPr sz="1200" b="0">
+                <a:solidFill>
+                  <a:srgbClr val="44546A"/>
+                </a:solidFill>
+                <a:latin typeface="Aptos"/>
+              </a:rPr>
+              <a:t>Stability   0.987</a:t>
+            </a:r>
+          </a:p>
+          <a:p>
+            <a:pPr algn="l"/>
+            <a:r>
+              <a:rPr sz="1200" b="0">
+                <a:solidFill>
+                  <a:srgbClr val="44546A"/>
+                </a:solidFill>
+                <a:latin typeface="Aptos"/>
+              </a:rPr>
+              <a:t>Variance   0.000037</a:t>
+            </a:r>
+          </a:p>
+          <a:p>
+            <a:pPr algn="l"/>
+            <a:endParaRPr sz="1200" b="0">
+              <a:solidFill>
+                <a:srgbClr val="44546A"/>
+              </a:solidFill>
+              <a:latin typeface="Aptos"/>
+            </a:endParaRPr>
+          </a:p>
+          <a:p>
+            <a:pPr algn="l"/>
+            <a:r>
+              <a:rPr sz="1200" b="0">
+                <a:solidFill>
+                  <a:srgbClr val="44546A"/>
+                </a:solidFill>
+                <a:latin typeface="Aptos"/>
+              </a:rPr>
+              <a:t>Lowest non-zero variance; validation trails OPRO by 4.5 points.</a:t>
+            </a:r>
+          </a:p>
+        </p:txBody>
+      </p:sp>
+      <p:sp>
+        <p:nvSpPr>
+          <p:cNvPr id="24" name="Head2"/>
+          <p:cNvSpPr/>
+          <p:nvPr/>
+        </p:nvSpPr>
+        <p:spPr>
+          <a:xfrm>
+            <a:off x="8093400" y="2050000"/>
+            <a:ext cx="3666800" cy="440000"/>
+          </a:xfrm>
+          <a:prstGeom prst="rect">
+            <a:avLst/>
+          </a:prstGeom>
+          <a:solidFill>
+            <a:srgbClr val="1F6F6F"/>
+          </a:solidFill>
+          <a:ln>
+            <a:noFill/>
+          </a:ln>
+        </p:spPr>
+        <p:txBody>
+          <a:bodyPr wrap="square" lIns="137160" tIns="91440" rIns="137160" bIns="91440" anchor="ctr"/>
+          <a:lstStyle/>
+          <a:p>
+            <a:pPr marL="0" indent="0" algn="l">
+              <a:buNone/>
+            </a:pPr>
+            <a:r>
+              <a:rPr sz="1400" b="1">
+                <a:solidFill>
+                  <a:srgbClr val="FFFFFF"/>
+                </a:solidFill>
+                <a:latin typeface="Aptos"/>
+              </a:rPr>
+              <a:t>EVOLUTIONARY</a:t>
+            </a:r>
+          </a:p>
+        </p:txBody>
+      </p:sp>
+      <p:sp>
+        <p:nvSpPr>
+          <p:cNvPr id="25" name="Body2"/>
+          <p:cNvSpPr/>
+          <p:nvPr/>
+        </p:nvSpPr>
+        <p:spPr>
+          <a:xfrm>
+            <a:off x="8093400" y="2490000"/>
+            <a:ext cx="3666800" cy="2050000"/>
+          </a:xfrm>
+          <a:prstGeom prst="rect">
+            <a:avLst/>
+          </a:prstGeom>
+          <a:solidFill>
+            <a:srgbClr val="F2F5F9"/>
+          </a:solidFill>
+          <a:ln>
+            <a:noFill/>
+          </a:ln>
+        </p:spPr>
+        <p:txBody>
+          <a:bodyPr wrap="square" lIns="137160" tIns="91440" rIns="137160" bIns="91440" anchor="t"/>
+          <a:lstStyle/>
+          <a:p>
+            <a:pPr marL="0" indent="0" algn="l">
+              <a:buNone/>
+            </a:pPr>
+            <a:r>
+              <a:rPr sz="1200" b="0">
+                <a:solidFill>
+                  <a:srgbClr val="44546A"/>
+                </a:solidFill>
+                <a:latin typeface="Aptos"/>
+              </a:rPr>
+              <a:t>Train balanced accuracy   0.970</a:t>
+            </a:r>
+          </a:p>
+          <a:p>
+            <a:pPr algn="l"/>
+            <a:r>
+              <a:rPr sz="1200" b="0">
+                <a:solidFill>
+                  <a:srgbClr val="44546A"/>
+                </a:solidFill>
+                <a:latin typeface="Aptos"/>
+              </a:rPr>
+              <a:t>Validation balanced accuracy   0.896</a:t>
+            </a:r>
+          </a:p>
+          <a:p>
+            <a:pPr algn="l"/>
+            <a:r>
+              <a:rPr sz="1200" b="0">
+                <a:solidFill>
+                  <a:srgbClr val="44546A"/>
+                </a:solidFill>
+                <a:latin typeface="Aptos"/>
+              </a:rPr>
+              <a:t>Stability   1.000</a:t>
+            </a:r>
+          </a:p>
+          <a:p>
+            <a:pPr algn="l"/>
+            <a:r>
+              <a:rPr sz="1200" b="0">
+                <a:solidFill>
+                  <a:srgbClr val="44546A"/>
+                </a:solidFill>
+                <a:latin typeface="Aptos"/>
+              </a:rPr>
+              <a:t>Variance   0.000000</a:t>
+            </a:r>
+          </a:p>
+          <a:p>
+            <a:pPr algn="l"/>
+            <a:endParaRPr sz="1200" b="0">
+              <a:solidFill>
+                <a:srgbClr val="44546A"/>
+              </a:solidFill>
+              <a:latin typeface="Aptos"/>
+            </a:endParaRPr>
+          </a:p>
+          <a:p>
+            <a:pPr algn="l"/>
+            <a:r>
+              <a:rPr sz="1200" b="0">
+                <a:solidFill>
+                  <a:srgbClr val="44546A"/>
+                </a:solidFill>
+                <a:latin typeface="Aptos"/>
+              </a:rPr>
+              <a:t>Perfect repeatability; train–validation gap: 7.4 points.</a:t>
+            </a:r>
+          </a:p>
+        </p:txBody>
+      </p:sp>
+      <p:sp>
+        <p:nvSpPr>
+          <p:cNvPr id="30" name="Takeaway"/>
+          <p:cNvSpPr/>
+          <p:nvPr/>
+        </p:nvSpPr>
+        <p:spPr>
+          <a:xfrm>
+            <a:off x="431800" y="4700000"/>
+            <a:ext cx="11328400" cy="1400000"/>
+          </a:xfrm>
+          <a:prstGeom prst="rect">
+            <a:avLst/>
+          </a:prstGeom>
+          <a:solidFill>
+            <a:srgbClr val="F4F7FB"/>
+          </a:solidFill>
+          <a:ln w="12700">
+            <a:solidFill>
+              <a:srgbClr val="0E2841"/>
+            </a:solidFill>
+          </a:ln>
+        </p:spPr>
+        <p:txBody>
+          <a:bodyPr wrap="square" lIns="182880" tIns="118872" rIns="182880" bIns="118872" anchor="t"/>
+          <a:lstStyle/>
+          <a:p>
+            <a:pPr marL="0" indent="0" algn="l">
+              <a:buNone/>
+            </a:pPr>
+            <a:r>
+              <a:rPr sz="1300">
+                <a:solidFill>
+                  <a:srgbClr val="333333"/>
+                </a:solidFill>
+                <a:latin typeface="Aptos"/>
+              </a:rPr>
+              <a:t>OPRO is the strongest generalizer. Evolutionary search finds the highest-scoring training prompt and is perfectly stable, but gives back most of that advantage on held-out validation.</a:t>
+            </a:r>
+          </a:p>
+        </p:txBody>
+      </p:sp>
+    </p:spTree>
+  </p:cSld>
+  <p:clrMapOvr>
+    <a:masterClrMapping/>
+  </p:clrMapOvr>
+</p:sld>
+</file>
+
 <file path=ppt/slides/slide2.xml><?xml version="1.0" encoding="utf-8"?>
 <p:sld xmlns:a="http://schemas.openxmlformats.org/drawingml/2006/main" xmlns:r="http://schemas.openxmlformats.org/officeDocument/2006/relationships" xmlns:p="http://schemas.openxmlformats.org/presentationml/2006/main">
   <p:cSld>
